--- a/databricks-deck/Big-Data-and-Databricks-Training.pptx
+++ b/databricks-deck/Big-Data-and-Databricks-Training.pptx
@@ -23526,7 +23526,7 @@
         <p:spPr>
           <a:xfrm>
             <a:off x="713232" y="3547872"/>
-            <a:ext cx="1626351" cy="822959"/>
+            <a:ext cx="1626351" cy="804671"/>
           </a:xfrm>
           <a:prstGeom prst="rect">
             <a:avLst/>
@@ -23910,7 +23910,7 @@
         <p:spPr>
           <a:xfrm>
             <a:off x="2997951" y="3547872"/>
-            <a:ext cx="1626351" cy="822959"/>
+            <a:ext cx="1626351" cy="804671"/>
           </a:xfrm>
           <a:prstGeom prst="rect">
             <a:avLst/>
@@ -24294,7 +24294,7 @@
         <p:spPr>
           <a:xfrm>
             <a:off x="5282671" y="3547872"/>
-            <a:ext cx="1626351" cy="822959"/>
+            <a:ext cx="1626351" cy="804671"/>
           </a:xfrm>
           <a:prstGeom prst="rect">
             <a:avLst/>
@@ -24915,7 +24915,7 @@
         <p:spPr>
           <a:xfrm>
             <a:off x="7567391" y="3547872"/>
-            <a:ext cx="1626351" cy="822959"/>
+            <a:ext cx="1626351" cy="804671"/>
           </a:xfrm>
           <a:prstGeom prst="rect">
             <a:avLst/>
@@ -25349,7 +25349,7 @@
         <p:spPr>
           <a:xfrm>
             <a:off x="9852111" y="3547872"/>
-            <a:ext cx="1626351" cy="822959"/>
+            <a:ext cx="1626351" cy="804671"/>
           </a:xfrm>
           <a:prstGeom prst="rect">
             <a:avLst/>
@@ -60943,7 +60943,7 @@
         <p:spPr>
           <a:xfrm>
             <a:off x="713232" y="3593592"/>
-            <a:ext cx="1626351" cy="777240"/>
+            <a:ext cx="1626351" cy="758952"/>
           </a:xfrm>
           <a:prstGeom prst="rect">
             <a:avLst/>
@@ -61327,7 +61327,7 @@
         <p:spPr>
           <a:xfrm>
             <a:off x="2997951" y="3593592"/>
-            <a:ext cx="1626351" cy="777240"/>
+            <a:ext cx="1626351" cy="758952"/>
           </a:xfrm>
           <a:prstGeom prst="rect">
             <a:avLst/>
@@ -61843,7 +61843,7 @@
         <p:spPr>
           <a:xfrm>
             <a:off x="5282671" y="3593592"/>
-            <a:ext cx="1626351" cy="777240"/>
+            <a:ext cx="1626351" cy="758952"/>
           </a:xfrm>
           <a:prstGeom prst="rect">
             <a:avLst/>
@@ -62275,7 +62275,7 @@
         <p:spPr>
           <a:xfrm>
             <a:off x="7567391" y="3593592"/>
-            <a:ext cx="1626351" cy="777240"/>
+            <a:ext cx="1626351" cy="758952"/>
           </a:xfrm>
           <a:prstGeom prst="rect">
             <a:avLst/>
@@ -62659,7 +62659,7 @@
         <p:spPr>
           <a:xfrm>
             <a:off x="9852111" y="3593592"/>
-            <a:ext cx="1626351" cy="777240"/>
+            <a:ext cx="1626351" cy="758952"/>
           </a:xfrm>
           <a:prstGeom prst="rect">
             <a:avLst/>
